--- a/dist/초5/영어/이해와읽기/초5_영어_이해와읽기_01_중심내용찾기_학생용.pptx
+++ b/dist/초5/영어/이해와읽기/초5_영어_이해와읽기_01_중심내용찾기_학생용.pptx
@@ -120,20 +120,20 @@
   <p:extLst>
     <p:ext uri="{521415D9-36F7-43E2-AB2F-B90AF26B5E84}">
       <p14:sectionLst xmlns:p14="http://schemas.microsoft.com/office/powerpoint/2010/main">
-        <p14:section name="도입" id="{54c6dd36-4843-3522-779b-7c5b97f0d076}">
+        <p14:section name="도입" id="{f060a5f3-b8de-b25c-4103-65f94281845e}">
           <p14:sldIdLst>
             <p14:sldId id="256"/>
             <p14:sldId id="257"/>
           </p14:sldIdLst>
         </p14:section>
-        <p14:section name="개념" id="{730db677-b014-8a50-a4b8-a82916fd416b}">
+        <p14:section name="개념" id="{048c334b-3029-a078-aa0a-aeaf2d34dff3}">
           <p14:sldIdLst>
             <p14:sldId id="258"/>
             <p14:sldId id="259"/>
             <p14:sldId id="263"/>
           </p14:sldIdLst>
         </p14:section>
-        <p14:section name="연습" id="{29e7f69c-5111-3bc0-be38-8ae50b84a16b}">
+        <p14:section name="연습" id="{72c3aeea-ea30-a9f6-6df5-6d4338a28121}">
           <p14:sldIdLst>
             <p14:sldId id="260"/>
             <p14:sldId id="261"/>
@@ -141,25 +141,25 @@
             <p14:sldId id="264"/>
           </p14:sldIdLst>
         </p14:section>
-        <p14:section name="개념" id="{2b22a13a-258e-95e8-46e2-881bf1701a3c}">
+        <p14:section name="개념" id="{eff5dcde-ad40-e699-8467-c87c2709e94b}">
           <p14:sldIdLst/>
         </p14:section>
-        <p14:section name="연습" id="{4e8b8406-90bb-7548-161a-c9f380921c65}">
+        <p14:section name="연습" id="{0c284675-7865-337c-2c28-48095494f57a}">
           <p14:sldIdLst/>
         </p14:section>
-        <p14:section name="확인" id="{9284ae6e-11b7-ab40-da7d-dbafbd45ecba}">
+        <p14:section name="확인" id="{24cc9173-41e6-215d-9780-9ba32545f519}">
           <p14:sldIdLst>
             <p14:sldId id="265"/>
             <p14:sldId id="266"/>
             <p14:sldId id="267"/>
           </p14:sldIdLst>
         </p14:section>
-        <p14:section name="정리" id="{ac6f8c15-7a2d-c58a-025e-57dc27a01eb4}">
+        <p14:section name="정리" id="{54d1685a-b7e6-68f8-1458-7860b0fbccbc}">
           <p14:sldIdLst>
             <p14:sldId id="268"/>
           </p14:sldIdLst>
         </p14:section>
-        <p14:section name="보충" id="{030b83e3-086b-24de-4c83-99d6176172bc}">
+        <p14:section name="보충" id="{6d12a562-cc7d-2812-9ac5-5b77dfa63531}">
           <p14:sldIdLst>
             <p14:sldId id="269"/>
           </p14:sldIdLst>
@@ -2908,7 +2908,7 @@
                 <a:ea typeface="맑은 고딕" pitchFamily="34" charset="-122"/>
                 <a:cs typeface="맑은 고딕" pitchFamily="34" charset="-120"/>
               </a:rPr>
-              <a:t>soccer</a:t>
+              <a:t>pizza</a:t>
             </a:r>
             <a:endParaRPr lang="ko-KR" sz="3200" dirty="0"/>
           </a:p>
@@ -2955,7 +2955,7 @@
                 <a:ea typeface="맑은 고딕" pitchFamily="34" charset="-122"/>
                 <a:cs typeface="맑은 고딕" pitchFamily="34" charset="-120"/>
               </a:rPr>
-              <a:t>soccer</a:t>
+              <a:t>pizza</a:t>
             </a:r>
             <a:endParaRPr lang="ko-KR" sz="3200" dirty="0"/>
           </a:p>
@@ -3002,7 +3002,7 @@
                 <a:ea typeface="맑은 고딕" pitchFamily="34" charset="-122"/>
                 <a:cs typeface="맑은 고딕" pitchFamily="34" charset="-120"/>
               </a:rPr>
-              <a:t>soccer</a:t>
+              <a:t>pizza</a:t>
             </a:r>
             <a:endParaRPr lang="ko-KR" sz="3200" dirty="0"/>
           </a:p>
